--- a/slides/reference.pptx
+++ b/slides/reference.pptx
@@ -1476,7 +1476,7 @@
           <a:bodyPr anchor="t"/>
           <a:lstStyle>
             <a:lvl1pPr algn="l">
-              <a:defRPr sz="2350" b="1" cap="all"/>
+              <a:defRPr sz="1850" b="1" cap="all"/>
             </a:lvl1pPr>
           </a:lstStyle>
           <a:p>
@@ -1508,7 +1508,7 @@
           <a:lstStyle>
             <a:lvl1pPr marL="0" indent="0">
               <a:buNone/>
-              <a:defRPr sz="1150">
+              <a:defRPr sz="950">
                 <a:solidFill>
                   <a:schemeClr val="tx1">
                     <a:tint val="75000"/>
@@ -1518,7 +1518,7 @@
             </a:lvl1pPr>
             <a:lvl2pPr marL="342900" indent="0">
               <a:buNone/>
-              <a:defRPr sz="1050">
+              <a:defRPr sz="850">
                 <a:solidFill>
                   <a:schemeClr val="tx1">
                     <a:tint val="75000"/>
@@ -1528,7 +1528,7 @@
             </a:lvl2pPr>
             <a:lvl3pPr marL="685800" indent="0">
               <a:buNone/>
-              <a:defRPr sz="950">
+              <a:defRPr sz="750">
                 <a:solidFill>
                   <a:schemeClr val="tx1">
                     <a:tint val="75000"/>
@@ -1538,7 +1538,7 @@
             </a:lvl3pPr>
             <a:lvl4pPr marL="1028700" indent="0">
               <a:buNone/>
-              <a:defRPr sz="800">
+              <a:defRPr sz="650">
                 <a:solidFill>
                   <a:schemeClr val="tx1">
                     <a:tint val="75000"/>
@@ -1548,7 +1548,7 @@
             </a:lvl4pPr>
             <a:lvl5pPr marL="1371600" indent="0">
               <a:buNone/>
-              <a:defRPr sz="800">
+              <a:defRPr sz="650">
                 <a:solidFill>
                   <a:schemeClr val="tx1">
                     <a:tint val="75000"/>
@@ -1558,7 +1558,7 @@
             </a:lvl5pPr>
             <a:lvl6pPr marL="1714500" indent="0">
               <a:buNone/>
-              <a:defRPr sz="800">
+              <a:defRPr sz="650">
                 <a:solidFill>
                   <a:schemeClr val="tx1">
                     <a:tint val="75000"/>
@@ -1568,7 +1568,7 @@
             </a:lvl6pPr>
             <a:lvl7pPr marL="2057400" indent="0">
               <a:buNone/>
-              <a:defRPr sz="800">
+              <a:defRPr sz="650">
                 <a:solidFill>
                   <a:schemeClr val="tx1">
                     <a:tint val="75000"/>
@@ -1578,7 +1578,7 @@
             </a:lvl7pPr>
             <a:lvl8pPr marL="2400300" indent="0">
               <a:buNone/>
-              <a:defRPr sz="800">
+              <a:defRPr sz="650">
                 <a:solidFill>
                   <a:schemeClr val="tx1">
                     <a:tint val="75000"/>
@@ -1588,7 +1588,7 @@
             </a:lvl8pPr>
             <a:lvl9pPr marL="2743200" indent="0">
               <a:buNone/>
-              <a:defRPr sz="800">
+              <a:defRPr sz="650">
                 <a:solidFill>
                   <a:schemeClr val="tx1">
                     <a:tint val="75000"/>
@@ -1743,31 +1743,31 @@
           <a:bodyPr/>
           <a:lstStyle>
             <a:lvl1pPr>
-              <a:defRPr sz="1650"/>
+              <a:defRPr sz="1300"/>
             </a:lvl1pPr>
             <a:lvl2pPr>
-              <a:defRPr sz="1400"/>
+              <a:defRPr sz="1100"/>
             </a:lvl2pPr>
             <a:lvl3pPr>
-              <a:defRPr sz="1150"/>
+              <a:defRPr sz="950"/>
             </a:lvl3pPr>
             <a:lvl4pPr>
-              <a:defRPr sz="1050"/>
+              <a:defRPr sz="850"/>
             </a:lvl4pPr>
             <a:lvl5pPr>
-              <a:defRPr sz="1050"/>
+              <a:defRPr sz="850"/>
             </a:lvl5pPr>
             <a:lvl6pPr>
-              <a:defRPr sz="1050"/>
+              <a:defRPr sz="850"/>
             </a:lvl6pPr>
             <a:lvl7pPr>
-              <a:defRPr sz="1050"/>
+              <a:defRPr sz="850"/>
             </a:lvl7pPr>
             <a:lvl8pPr>
-              <a:defRPr sz="1050"/>
+              <a:defRPr sz="850"/>
             </a:lvl8pPr>
             <a:lvl9pPr>
-              <a:defRPr sz="1050"/>
+              <a:defRPr sz="850"/>
             </a:lvl9pPr>
           </a:lstStyle>
           <a:p>
@@ -1827,31 +1827,31 @@
           <a:bodyPr/>
           <a:lstStyle>
             <a:lvl1pPr>
-              <a:defRPr sz="1650"/>
+              <a:defRPr sz="1300"/>
             </a:lvl1pPr>
             <a:lvl2pPr>
-              <a:defRPr sz="1400"/>
+              <a:defRPr sz="1100"/>
             </a:lvl2pPr>
             <a:lvl3pPr>
-              <a:defRPr sz="1150"/>
+              <a:defRPr sz="950"/>
             </a:lvl3pPr>
             <a:lvl4pPr>
-              <a:defRPr sz="1050"/>
+              <a:defRPr sz="850"/>
             </a:lvl4pPr>
             <a:lvl5pPr>
-              <a:defRPr sz="1050"/>
+              <a:defRPr sz="850"/>
             </a:lvl5pPr>
             <a:lvl6pPr>
-              <a:defRPr sz="1050"/>
+              <a:defRPr sz="850"/>
             </a:lvl6pPr>
             <a:lvl7pPr>
-              <a:defRPr sz="1050"/>
+              <a:defRPr sz="850"/>
             </a:lvl7pPr>
             <a:lvl8pPr>
-              <a:defRPr sz="1050"/>
+              <a:defRPr sz="850"/>
             </a:lvl8pPr>
             <a:lvl9pPr>
-              <a:defRPr sz="1050"/>
+              <a:defRPr sz="850"/>
             </a:lvl9pPr>
           </a:lstStyle>
           <a:p>
@@ -2033,39 +2033,39 @@
           <a:lstStyle>
             <a:lvl1pPr marL="0" indent="0">
               <a:buNone/>
-              <a:defRPr sz="1400" b="1"/>
+              <a:defRPr sz="1100" b="1"/>
             </a:lvl1pPr>
             <a:lvl2pPr marL="342900" indent="0">
               <a:buNone/>
-              <a:defRPr sz="1150" b="1"/>
+              <a:defRPr sz="950" b="1"/>
             </a:lvl2pPr>
             <a:lvl3pPr marL="685800" indent="0">
               <a:buNone/>
-              <a:defRPr sz="1050" b="1"/>
+              <a:defRPr sz="850" b="1"/>
             </a:lvl3pPr>
             <a:lvl4pPr marL="1028700" indent="0">
               <a:buNone/>
-              <a:defRPr sz="950" b="1"/>
+              <a:defRPr sz="750" b="1"/>
             </a:lvl4pPr>
             <a:lvl5pPr marL="1371600" indent="0">
               <a:buNone/>
-              <a:defRPr sz="950" b="1"/>
+              <a:defRPr sz="750" b="1"/>
             </a:lvl5pPr>
             <a:lvl6pPr marL="1714500" indent="0">
               <a:buNone/>
-              <a:defRPr sz="950" b="1"/>
+              <a:defRPr sz="750" b="1"/>
             </a:lvl6pPr>
             <a:lvl7pPr marL="2057400" indent="0">
               <a:buNone/>
-              <a:defRPr sz="950" b="1"/>
+              <a:defRPr sz="750" b="1"/>
             </a:lvl7pPr>
             <a:lvl8pPr marL="2400300" indent="0">
               <a:buNone/>
-              <a:defRPr sz="950" b="1"/>
+              <a:defRPr sz="750" b="1"/>
             </a:lvl8pPr>
             <a:lvl9pPr marL="2743200" indent="0">
               <a:buNone/>
-              <a:defRPr sz="950" b="1"/>
+              <a:defRPr sz="750" b="1"/>
             </a:lvl9pPr>
           </a:lstStyle>
           <a:p>
@@ -2097,31 +2097,31 @@
           <a:bodyPr/>
           <a:lstStyle>
             <a:lvl1pPr>
-              <a:defRPr sz="1400"/>
+              <a:defRPr sz="1100"/>
             </a:lvl1pPr>
             <a:lvl2pPr>
-              <a:defRPr sz="1150"/>
+              <a:defRPr sz="950"/>
             </a:lvl2pPr>
             <a:lvl3pPr>
-              <a:defRPr sz="1050"/>
+              <a:defRPr sz="850"/>
             </a:lvl3pPr>
             <a:lvl4pPr>
-              <a:defRPr sz="950"/>
+              <a:defRPr sz="750"/>
             </a:lvl4pPr>
             <a:lvl5pPr>
-              <a:defRPr sz="950"/>
+              <a:defRPr sz="750"/>
             </a:lvl5pPr>
             <a:lvl6pPr>
-              <a:defRPr sz="950"/>
+              <a:defRPr sz="750"/>
             </a:lvl6pPr>
             <a:lvl7pPr>
-              <a:defRPr sz="950"/>
+              <a:defRPr sz="750"/>
             </a:lvl7pPr>
             <a:lvl8pPr>
-              <a:defRPr sz="950"/>
+              <a:defRPr sz="750"/>
             </a:lvl8pPr>
             <a:lvl9pPr>
-              <a:defRPr sz="950"/>
+              <a:defRPr sz="750"/>
             </a:lvl9pPr>
           </a:lstStyle>
           <a:p>
@@ -2182,39 +2182,39 @@
           <a:lstStyle>
             <a:lvl1pPr marL="0" indent="0">
               <a:buNone/>
-              <a:defRPr sz="1400" b="1"/>
+              <a:defRPr sz="1100" b="1"/>
             </a:lvl1pPr>
             <a:lvl2pPr marL="342900" indent="0">
               <a:buNone/>
-              <a:defRPr sz="1150" b="1"/>
+              <a:defRPr sz="950" b="1"/>
             </a:lvl2pPr>
             <a:lvl3pPr marL="685800" indent="0">
               <a:buNone/>
-              <a:defRPr sz="1050" b="1"/>
+              <a:defRPr sz="850" b="1"/>
             </a:lvl3pPr>
             <a:lvl4pPr marL="1028700" indent="0">
               <a:buNone/>
-              <a:defRPr sz="950" b="1"/>
+              <a:defRPr sz="750" b="1"/>
             </a:lvl4pPr>
             <a:lvl5pPr marL="1371600" indent="0">
               <a:buNone/>
-              <a:defRPr sz="950" b="1"/>
+              <a:defRPr sz="750" b="1"/>
             </a:lvl5pPr>
             <a:lvl6pPr marL="1714500" indent="0">
               <a:buNone/>
-              <a:defRPr sz="950" b="1"/>
+              <a:defRPr sz="750" b="1"/>
             </a:lvl6pPr>
             <a:lvl7pPr marL="2057400" indent="0">
               <a:buNone/>
-              <a:defRPr sz="950" b="1"/>
+              <a:defRPr sz="750" b="1"/>
             </a:lvl7pPr>
             <a:lvl8pPr marL="2400300" indent="0">
               <a:buNone/>
-              <a:defRPr sz="950" b="1"/>
+              <a:defRPr sz="750" b="1"/>
             </a:lvl8pPr>
             <a:lvl9pPr marL="2743200" indent="0">
               <a:buNone/>
-              <a:defRPr sz="950" b="1"/>
+              <a:defRPr sz="750" b="1"/>
             </a:lvl9pPr>
           </a:lstStyle>
           <a:p>
@@ -2246,31 +2246,31 @@
           <a:bodyPr/>
           <a:lstStyle>
             <a:lvl1pPr>
-              <a:defRPr sz="1400"/>
+              <a:defRPr sz="1100"/>
             </a:lvl1pPr>
             <a:lvl2pPr>
-              <a:defRPr sz="1150"/>
+              <a:defRPr sz="950"/>
             </a:lvl2pPr>
             <a:lvl3pPr>
-              <a:defRPr sz="1050"/>
+              <a:defRPr sz="850"/>
             </a:lvl3pPr>
             <a:lvl4pPr>
-              <a:defRPr sz="950"/>
+              <a:defRPr sz="750"/>
             </a:lvl4pPr>
             <a:lvl5pPr>
-              <a:defRPr sz="950"/>
+              <a:defRPr sz="750"/>
             </a:lvl5pPr>
             <a:lvl6pPr>
-              <a:defRPr sz="950"/>
+              <a:defRPr sz="750"/>
             </a:lvl6pPr>
             <a:lvl7pPr>
-              <a:defRPr sz="950"/>
+              <a:defRPr sz="750"/>
             </a:lvl7pPr>
             <a:lvl8pPr>
-              <a:defRPr sz="950"/>
+              <a:defRPr sz="750"/>
             </a:lvl8pPr>
             <a:lvl9pPr>
-              <a:defRPr sz="950"/>
+              <a:defRPr sz="750"/>
             </a:lvl9pPr>
           </a:lstStyle>
           <a:p>
@@ -2637,7 +2637,7 @@
           <a:bodyPr anchor="b"/>
           <a:lstStyle>
             <a:lvl1pPr algn="l">
-              <a:defRPr sz="1150" b="1"/>
+              <a:defRPr sz="950" b="1"/>
             </a:lvl1pPr>
           </a:lstStyle>
           <a:p>
@@ -2668,31 +2668,31 @@
           <a:bodyPr/>
           <a:lstStyle>
             <a:lvl1pPr>
-              <a:defRPr sz="1850"/>
+              <a:defRPr sz="1500"/>
             </a:lvl1pPr>
             <a:lvl2pPr>
-              <a:defRPr sz="1650"/>
+              <a:defRPr sz="1300"/>
             </a:lvl2pPr>
             <a:lvl3pPr>
-              <a:defRPr sz="1400"/>
+              <a:defRPr sz="1100"/>
             </a:lvl3pPr>
             <a:lvl4pPr>
-              <a:defRPr sz="1150"/>
+              <a:defRPr sz="950"/>
             </a:lvl4pPr>
             <a:lvl5pPr>
-              <a:defRPr sz="1150"/>
+              <a:defRPr sz="950"/>
             </a:lvl5pPr>
             <a:lvl6pPr>
-              <a:defRPr sz="1150"/>
+              <a:defRPr sz="950"/>
             </a:lvl6pPr>
             <a:lvl7pPr>
-              <a:defRPr sz="1150"/>
+              <a:defRPr sz="950"/>
             </a:lvl7pPr>
             <a:lvl8pPr>
-              <a:defRPr sz="1150"/>
+              <a:defRPr sz="950"/>
             </a:lvl8pPr>
             <a:lvl9pPr>
-              <a:defRPr sz="1150"/>
+              <a:defRPr sz="950"/>
             </a:lvl9pPr>
           </a:lstStyle>
           <a:p>
@@ -2753,39 +2753,39 @@
           <a:lstStyle>
             <a:lvl1pPr marL="0" indent="0">
               <a:buNone/>
-              <a:defRPr sz="800"/>
+              <a:defRPr sz="650"/>
             </a:lvl1pPr>
             <a:lvl2pPr marL="342900" indent="0">
               <a:buNone/>
-              <a:defRPr sz="700"/>
+              <a:defRPr sz="550"/>
             </a:lvl2pPr>
             <a:lvl3pPr marL="685800" indent="0">
               <a:buNone/>
-              <a:defRPr sz="700"/>
+              <a:defRPr sz="550"/>
             </a:lvl3pPr>
             <a:lvl4pPr marL="1028700" indent="0">
               <a:buNone/>
-              <a:defRPr sz="700"/>
+              <a:defRPr sz="550"/>
             </a:lvl4pPr>
             <a:lvl5pPr marL="1371600" indent="0">
               <a:buNone/>
-              <a:defRPr sz="700"/>
+              <a:defRPr sz="550"/>
             </a:lvl5pPr>
             <a:lvl6pPr marL="1714500" indent="0">
               <a:buNone/>
-              <a:defRPr sz="700"/>
+              <a:defRPr sz="550"/>
             </a:lvl6pPr>
             <a:lvl7pPr marL="2057400" indent="0">
               <a:buNone/>
-              <a:defRPr sz="700"/>
+              <a:defRPr sz="550"/>
             </a:lvl7pPr>
             <a:lvl8pPr marL="2400300" indent="0">
               <a:buNone/>
-              <a:defRPr sz="700"/>
+              <a:defRPr sz="550"/>
             </a:lvl8pPr>
             <a:lvl9pPr marL="2743200" indent="0">
               <a:buNone/>
-              <a:defRPr sz="700"/>
+              <a:defRPr sz="550"/>
             </a:lvl9pPr>
           </a:lstStyle>
           <a:p>
@@ -2912,7 +2912,7 @@
           <a:bodyPr anchor="b"/>
           <a:lstStyle>
             <a:lvl1pPr algn="l">
-              <a:defRPr sz="1150" b="1"/>
+              <a:defRPr sz="950" b="1"/>
             </a:lvl1pPr>
           </a:lstStyle>
           <a:p>
@@ -2944,39 +2944,39 @@
           <a:lstStyle>
             <a:lvl1pPr marL="0" indent="0">
               <a:buNone/>
-              <a:defRPr sz="1850"/>
+              <a:defRPr sz="1500"/>
             </a:lvl1pPr>
             <a:lvl2pPr marL="342900" indent="0">
               <a:buNone/>
-              <a:defRPr sz="1650"/>
+              <a:defRPr sz="1300"/>
             </a:lvl2pPr>
             <a:lvl3pPr marL="685800" indent="0">
               <a:buNone/>
-              <a:defRPr sz="1400"/>
+              <a:defRPr sz="1100"/>
             </a:lvl3pPr>
             <a:lvl4pPr marL="1028700" indent="0">
               <a:buNone/>
-              <a:defRPr sz="1150"/>
+              <a:defRPr sz="950"/>
             </a:lvl4pPr>
             <a:lvl5pPr marL="1371600" indent="0">
               <a:buNone/>
-              <a:defRPr sz="1150"/>
+              <a:defRPr sz="950"/>
             </a:lvl5pPr>
             <a:lvl6pPr marL="1714500" indent="0">
               <a:buNone/>
-              <a:defRPr sz="1150"/>
+              <a:defRPr sz="950"/>
             </a:lvl6pPr>
             <a:lvl7pPr marL="2057400" indent="0">
               <a:buNone/>
-              <a:defRPr sz="1150"/>
+              <a:defRPr sz="950"/>
             </a:lvl7pPr>
             <a:lvl8pPr marL="2400300" indent="0">
               <a:buNone/>
-              <a:defRPr sz="1150"/>
+              <a:defRPr sz="950"/>
             </a:lvl8pPr>
             <a:lvl9pPr marL="2743200" indent="0">
               <a:buNone/>
-              <a:defRPr sz="1150"/>
+              <a:defRPr sz="950"/>
             </a:lvl9pPr>
           </a:lstStyle>
           <a:p>
@@ -3005,39 +3005,39 @@
           <a:lstStyle>
             <a:lvl1pPr marL="0" indent="0">
               <a:buNone/>
-              <a:defRPr sz="800"/>
+              <a:defRPr sz="650"/>
             </a:lvl1pPr>
             <a:lvl2pPr marL="342900" indent="0">
               <a:buNone/>
-              <a:defRPr sz="700"/>
+              <a:defRPr sz="550"/>
             </a:lvl2pPr>
             <a:lvl3pPr marL="685800" indent="0">
               <a:buNone/>
-              <a:defRPr sz="700"/>
+              <a:defRPr sz="550"/>
             </a:lvl3pPr>
             <a:lvl4pPr marL="1028700" indent="0">
               <a:buNone/>
-              <a:defRPr sz="700"/>
+              <a:defRPr sz="550"/>
             </a:lvl4pPr>
             <a:lvl5pPr marL="1371600" indent="0">
               <a:buNone/>
-              <a:defRPr sz="700"/>
+              <a:defRPr sz="550"/>
             </a:lvl5pPr>
             <a:lvl6pPr marL="1714500" indent="0">
               <a:buNone/>
-              <a:defRPr sz="700"/>
+              <a:defRPr sz="550"/>
             </a:lvl6pPr>
             <a:lvl7pPr marL="2057400" indent="0">
               <a:buNone/>
-              <a:defRPr sz="700"/>
+              <a:defRPr sz="550"/>
             </a:lvl7pPr>
             <a:lvl8pPr marL="2400300" indent="0">
               <a:buNone/>
-              <a:defRPr sz="700"/>
+              <a:defRPr sz="550"/>
             </a:lvl8pPr>
             <a:lvl9pPr marL="2743200" indent="0">
               <a:buNone/>
-              <a:defRPr sz="700"/>
+              <a:defRPr sz="550"/>
             </a:lvl9pPr>
           </a:lstStyle>
           <a:p>
@@ -3265,7 +3265,7 @@
           <a:bodyPr vert="horz" lIns="91440" tIns="45720" rIns="91440" bIns="45720" rtlCol="0" anchor="ctr"/>
           <a:lstStyle>
             <a:lvl1pPr algn="l">
-              <a:defRPr sz="700">
+              <a:defRPr sz="550">
                 <a:solidFill>
                   <a:schemeClr val="tx1">
                     <a:tint val="75000"/>
@@ -3306,7 +3306,7 @@
           <a:bodyPr vert="horz" lIns="91440" tIns="45720" rIns="91440" bIns="45720" rtlCol="0" anchor="ctr"/>
           <a:lstStyle>
             <a:lvl1pPr algn="ctr">
-              <a:defRPr sz="700">
+              <a:defRPr sz="550">
                 <a:solidFill>
                   <a:schemeClr val="tx1">
                     <a:tint val="75000"/>
@@ -3343,7 +3343,7 @@
           <a:bodyPr vert="horz" lIns="91440" tIns="45720" rIns="91440" bIns="45720" rtlCol="0" anchor="ctr"/>
           <a:lstStyle>
             <a:lvl1pPr algn="r">
-              <a:defRPr sz="700">
+              <a:defRPr sz="550">
                 <a:solidFill>
                   <a:schemeClr val="tx1">
                     <a:tint val="75000"/>
@@ -3389,7 +3389,7 @@
           <a:spcPct val="0"/>
         </a:spcBef>
         <a:buNone/>
-        <a:defRPr sz="2550" kern="1200">
+        <a:defRPr sz="2050" kern="1200">
           <a:solidFill>
             <a:schemeClr val="tx1"/>
           </a:solidFill>
@@ -3406,7 +3406,7 @@
         </a:spcBef>
         <a:buFont typeface="Arial"/>
         <a:buChar char="•"/>
-        <a:defRPr sz="1850" kern="1200">
+        <a:defRPr sz="1500" kern="1200">
           <a:solidFill>
             <a:schemeClr val="tx1"/>
           </a:solidFill>
@@ -3421,7 +3421,7 @@
         </a:spcBef>
         <a:buFont typeface="Arial"/>
         <a:buChar char="–"/>
-        <a:defRPr sz="1650" kern="1200">
+        <a:defRPr sz="1300" kern="1200">
           <a:solidFill>
             <a:schemeClr val="tx1"/>
           </a:solidFill>
@@ -3436,7 +3436,7 @@
         </a:spcBef>
         <a:buFont typeface="Arial"/>
         <a:buChar char="•"/>
-        <a:defRPr sz="1400" kern="1200">
+        <a:defRPr sz="1100" kern="1200">
           <a:solidFill>
             <a:schemeClr val="tx1"/>
           </a:solidFill>
@@ -3451,7 +3451,7 @@
         </a:spcBef>
         <a:buFont typeface="Arial"/>
         <a:buChar char="–"/>
-        <a:defRPr sz="1150" kern="1200">
+        <a:defRPr sz="950" kern="1200">
           <a:solidFill>
             <a:schemeClr val="tx1"/>
           </a:solidFill>
@@ -3466,7 +3466,7 @@
         </a:spcBef>
         <a:buFont typeface="Arial"/>
         <a:buChar char="»"/>
-        <a:defRPr sz="1150" kern="1200">
+        <a:defRPr sz="950" kern="1200">
           <a:solidFill>
             <a:schemeClr val="tx1"/>
           </a:solidFill>
@@ -3481,7 +3481,7 @@
         </a:spcBef>
         <a:buFont typeface="Arial"/>
         <a:buChar char="•"/>
-        <a:defRPr sz="1150" kern="1200">
+        <a:defRPr sz="950" kern="1200">
           <a:solidFill>
             <a:schemeClr val="tx1"/>
           </a:solidFill>
@@ -3496,7 +3496,7 @@
         </a:spcBef>
         <a:buFont typeface="Arial"/>
         <a:buChar char="•"/>
-        <a:defRPr sz="1150" kern="1200">
+        <a:defRPr sz="950" kern="1200">
           <a:solidFill>
             <a:schemeClr val="tx1"/>
           </a:solidFill>
@@ -3511,7 +3511,7 @@
         </a:spcBef>
         <a:buFont typeface="Arial"/>
         <a:buChar char="•"/>
-        <a:defRPr sz="1150" kern="1200">
+        <a:defRPr sz="950" kern="1200">
           <a:solidFill>
             <a:schemeClr val="tx1"/>
           </a:solidFill>
@@ -3526,7 +3526,7 @@
         </a:spcBef>
         <a:buFont typeface="Arial"/>
         <a:buChar char="•"/>
-        <a:defRPr sz="1150" kern="1200">
+        <a:defRPr sz="950" kern="1200">
           <a:solidFill>
             <a:schemeClr val="tx1"/>
           </a:solidFill>
@@ -3541,7 +3541,7 @@
         <a:defRPr lang="en-US"/>
       </a:defPPr>
       <a:lvl1pPr marL="0" algn="l" defTabSz="342900" rtl="0" eaLnBrk="1" latinLnBrk="0" hangingPunct="1">
-        <a:defRPr sz="1050" kern="1200">
+        <a:defRPr sz="850" kern="1200">
           <a:solidFill>
             <a:schemeClr val="tx1"/>
           </a:solidFill>
@@ -3551,7 +3551,7 @@
         </a:defRPr>
       </a:lvl1pPr>
       <a:lvl2pPr marL="342900" algn="l" defTabSz="342900" rtl="0" eaLnBrk="1" latinLnBrk="0" hangingPunct="1">
-        <a:defRPr sz="1050" kern="1200">
+        <a:defRPr sz="850" kern="1200">
           <a:solidFill>
             <a:schemeClr val="tx1"/>
           </a:solidFill>
@@ -3561,7 +3561,7 @@
         </a:defRPr>
       </a:lvl2pPr>
       <a:lvl3pPr marL="685800" algn="l" defTabSz="342900" rtl="0" eaLnBrk="1" latinLnBrk="0" hangingPunct="1">
-        <a:defRPr sz="1050" kern="1200">
+        <a:defRPr sz="850" kern="1200">
           <a:solidFill>
             <a:schemeClr val="tx1"/>
           </a:solidFill>
@@ -3571,7 +3571,7 @@
         </a:defRPr>
       </a:lvl3pPr>
       <a:lvl4pPr marL="1028700" algn="l" defTabSz="342900" rtl="0" eaLnBrk="1" latinLnBrk="0" hangingPunct="1">
-        <a:defRPr sz="1050" kern="1200">
+        <a:defRPr sz="850" kern="1200">
           <a:solidFill>
             <a:schemeClr val="tx1"/>
           </a:solidFill>
@@ -3581,7 +3581,7 @@
         </a:defRPr>
       </a:lvl4pPr>
       <a:lvl5pPr marL="1371600" algn="l" defTabSz="342900" rtl="0" eaLnBrk="1" latinLnBrk="0" hangingPunct="1">
-        <a:defRPr sz="1050" kern="1200">
+        <a:defRPr sz="850" kern="1200">
           <a:solidFill>
             <a:schemeClr val="tx1"/>
           </a:solidFill>
@@ -3591,7 +3591,7 @@
         </a:defRPr>
       </a:lvl5pPr>
       <a:lvl6pPr marL="1714500" algn="l" defTabSz="342900" rtl="0" eaLnBrk="1" latinLnBrk="0" hangingPunct="1">
-        <a:defRPr sz="1050" kern="1200">
+        <a:defRPr sz="850" kern="1200">
           <a:solidFill>
             <a:schemeClr val="tx1"/>
           </a:solidFill>
@@ -3601,7 +3601,7 @@
         </a:defRPr>
       </a:lvl6pPr>
       <a:lvl7pPr marL="2057400" algn="l" defTabSz="342900" rtl="0" eaLnBrk="1" latinLnBrk="0" hangingPunct="1">
-        <a:defRPr sz="1050" kern="1200">
+        <a:defRPr sz="850" kern="1200">
           <a:solidFill>
             <a:schemeClr val="tx1"/>
           </a:solidFill>
@@ -3611,7 +3611,7 @@
         </a:defRPr>
       </a:lvl7pPr>
       <a:lvl8pPr marL="2400300" algn="l" defTabSz="342900" rtl="0" eaLnBrk="1" latinLnBrk="0" hangingPunct="1">
-        <a:defRPr sz="1050" kern="1200">
+        <a:defRPr sz="850" kern="1200">
           <a:solidFill>
             <a:schemeClr val="tx1"/>
           </a:solidFill>
@@ -3621,7 +3621,7 @@
         </a:defRPr>
       </a:lvl8pPr>
       <a:lvl9pPr marL="2743200" algn="l" defTabSz="342900" rtl="0" eaLnBrk="1" latinLnBrk="0" hangingPunct="1">
-        <a:defRPr sz="1050" kern="1200">
+        <a:defRPr sz="850" kern="1200">
           <a:solidFill>
             <a:schemeClr val="tx1"/>
           </a:solidFill>

--- a/slides/reference.pptx
+++ b/slides/reference.pptx
@@ -3358,6 +3358,72 @@
               <a:t>‹#›</a:t>
             </a:fld>
             <a:endParaRPr lang="en-US"/>
+          </a:p>
+        </p:txBody>
+      </p:sp>
+      <p:sp>
+        <p:nvSpPr>
+          <p:cNvPr id="7" name="Author Footer"/>
+          <p:cNvSpPr txBox="1"/>
+          <p:nvPr/>
+        </p:nvSpPr>
+        <p:spPr>
+          <a:xfrm>
+            <a:off x="457200" y="4735000"/>
+            <a:ext cx="5000000" cy="260000"/>
+          </a:xfrm>
+          <a:prstGeom prst="rect">
+            <a:avLst/>
+          </a:prstGeom>
+          <a:noFill/>
+        </p:spPr>
+        <p:txBody>
+          <a:bodyPr wrap="square" lIns="0" tIns="0" rIns="0" bIns="0" anchor="ctr"/>
+          <a:lstStyle/>
+          <a:p>
+            <a:pPr algn="l"/>
+            <a:r>
+              <a:rPr lang="en-US" sz="900" dirty="0">
+                <a:solidFill>
+                  <a:srgbClr val="6E7275"/>
+                </a:solidFill>
+                <a:latin typeface="+mn-lt"/>
+              </a:rPr>
+              <a:t>Thierry Warin, PhD</a:t>
+            </a:r>
+          </a:p>
+        </p:txBody>
+      </p:sp>
+      <p:sp>
+        <p:nvSpPr>
+          <p:cNvPr id="8" name="Slide Number Footer"/>
+          <p:cNvSpPr txBox="1"/>
+          <p:nvPr/>
+        </p:nvSpPr>
+        <p:spPr>
+          <a:xfrm>
+            <a:off x="7200000" y="4735000"/>
+            <a:ext cx="1486800" cy="260000"/>
+          </a:xfrm>
+          <a:prstGeom prst="rect">
+            <a:avLst/>
+          </a:prstGeom>
+          <a:noFill/>
+        </p:spPr>
+        <p:txBody>
+          <a:bodyPr wrap="square" lIns="0" tIns="0" rIns="0" bIns="0" anchor="ctr"/>
+          <a:lstStyle/>
+          <a:p>
+            <a:pPr algn="r"/>
+            <a:fld id="{9B1A2C3D-4E5F-6A7B-8C9D-0E1F2A3B4C5D}" type="slidenum">
+              <a:rPr lang="en-US" sz="900" dirty="0">
+                <a:solidFill>
+                  <a:srgbClr val="6E7275"/>
+                </a:solidFill>
+                <a:latin typeface="+mn-lt"/>
+              </a:rPr>
+              <a:t>2</a:t>
+            </a:fld>
           </a:p>
         </p:txBody>
       </p:sp>

--- a/slides/reference.pptx
+++ b/slides/reference.pptx
@@ -1468,15 +1468,15 @@
         </p:nvSpPr>
         <p:spPr>
           <a:xfrm>
-            <a:off x="722313" y="3305176"/>
-            <a:ext cx="7772400" cy="1021556"/>
+            <a:off x="722313" y="1850000"/>
+            <a:ext cx="7772400" cy="1300000"/>
           </a:xfrm>
         </p:spPr>
         <p:txBody>
           <a:bodyPr anchor="t"/>
           <a:lstStyle>
             <a:lvl1pPr algn="l">
-              <a:defRPr sz="1850" b="1" cap="all"/>
+              <a:defRPr sz="2800" b="1" cap="none"/>
             </a:lvl1pPr>
           </a:lstStyle>
           <a:p>
@@ -1499,8 +1499,8 @@
         </p:nvSpPr>
         <p:spPr>
           <a:xfrm>
-            <a:off x="722313" y="2180035"/>
-            <a:ext cx="7772400" cy="1125140"/>
+            <a:off x="722313" y="3250000"/>
+            <a:ext cx="7772400" cy="700000"/>
           </a:xfrm>
         </p:spPr>
         <p:txBody>
